--- a/public/videos/repositories/wait-time-alert/wait-time-alert-tech-preview.pptx
+++ b/public/videos/repositories/wait-time-alert/wait-time-alert-tech-preview.pptx
@@ -134,7 +134,7 @@
           <p:cNvPr id="2" name="タイトル 1">
             <a:extLst>
               <a:ext uri="{FF2B5EF4-FFF2-40B4-BE49-F238E27FC236}">
-                <a16:creationId xmlns:a16="http://schemas.microsoft.com/office/drawing/2014/main" id="{8B62D555-0FC4-9C52-5518-82A3A17D6AE9}"/>
+                <a16:creationId xmlns:a16="http://schemas.microsoft.com/office/drawing/2014/main" id="{6A6C2609-22C8-4136-A41A-02823FCECE39}"/>
               </a:ext>
             </a:extLst>
           </p:cNvPr>
@@ -171,7 +171,7 @@
           <p:cNvPr id="3" name="字幕 2">
             <a:extLst>
               <a:ext uri="{FF2B5EF4-FFF2-40B4-BE49-F238E27FC236}">
-                <a16:creationId xmlns:a16="http://schemas.microsoft.com/office/drawing/2014/main" id="{BEDA1311-9DEB-FAA0-ACAC-F2A4EE28AFD8}"/>
+                <a16:creationId xmlns:a16="http://schemas.microsoft.com/office/drawing/2014/main" id="{38AE893C-1489-88E0-5AF0-9F09DBF1C0AE}"/>
               </a:ext>
             </a:extLst>
           </p:cNvPr>
@@ -241,7 +241,7 @@
           <p:cNvPr id="4" name="日付プレースホルダー 3">
             <a:extLst>
               <a:ext uri="{FF2B5EF4-FFF2-40B4-BE49-F238E27FC236}">
-                <a16:creationId xmlns:a16="http://schemas.microsoft.com/office/drawing/2014/main" id="{F6F41257-ED2D-1F3C-8A5A-2D5AC3A87B68}"/>
+                <a16:creationId xmlns:a16="http://schemas.microsoft.com/office/drawing/2014/main" id="{DA587558-25BE-A5E5-38EC-CD776AC6AEF1}"/>
               </a:ext>
             </a:extLst>
           </p:cNvPr>
@@ -257,7 +257,7 @@
           <a:bodyPr/>
           <a:lstStyle/>
           <a:p>
-            <a:fld id="{6B89269D-720E-49DD-8907-60321152CD14}" type="datetimeFigureOut">
+            <a:fld id="{A3DF16B0-CA0C-4E62-8286-BA216E1CFE48}" type="datetimeFigureOut">
               <a:rPr kumimoji="1" lang="ja-JP" altLang="en-US" smtClean="0"/>
               <a:t>2026/7/30</a:t>
             </a:fld>
@@ -270,7 +270,7 @@
           <p:cNvPr id="5" name="フッター プレースホルダー 4">
             <a:extLst>
               <a:ext uri="{FF2B5EF4-FFF2-40B4-BE49-F238E27FC236}">
-                <a16:creationId xmlns:a16="http://schemas.microsoft.com/office/drawing/2014/main" id="{C3ECBE8A-3011-92B9-A8C3-EA40B01DFC02}"/>
+                <a16:creationId xmlns:a16="http://schemas.microsoft.com/office/drawing/2014/main" id="{C7842D96-1E27-6D46-7B0D-3410282CD376}"/>
               </a:ext>
             </a:extLst>
           </p:cNvPr>
@@ -295,7 +295,7 @@
           <p:cNvPr id="6" name="スライド番号プレースホルダー 5">
             <a:extLst>
               <a:ext uri="{FF2B5EF4-FFF2-40B4-BE49-F238E27FC236}">
-                <a16:creationId xmlns:a16="http://schemas.microsoft.com/office/drawing/2014/main" id="{7F68A85F-9EF6-4E25-B686-B9000A866BCB}"/>
+                <a16:creationId xmlns:a16="http://schemas.microsoft.com/office/drawing/2014/main" id="{E2317BA8-EC7F-4C8D-9DF6-F6698EC3C951}"/>
               </a:ext>
             </a:extLst>
           </p:cNvPr>
@@ -311,7 +311,7 @@
           <a:bodyPr/>
           <a:lstStyle/>
           <a:p>
-            <a:fld id="{C8B7375D-A02E-4A21-9363-A09D1752CEA3}" type="slidenum">
+            <a:fld id="{921CBC5F-5F50-422D-AD0D-82B6CA84F60E}" type="slidenum">
               <a:rPr kumimoji="1" lang="ja-JP" altLang="en-US" smtClean="0"/>
               <a:t>‹#›</a:t>
             </a:fld>
@@ -322,7 +322,7 @@
     </p:spTree>
     <p:extLst>
       <p:ext uri="{BB962C8B-B14F-4D97-AF65-F5344CB8AC3E}">
-        <p14:creationId xmlns:p14="http://schemas.microsoft.com/office/powerpoint/2010/main" val="2826522730"/>
+        <p14:creationId xmlns:p14="http://schemas.microsoft.com/office/powerpoint/2010/main" val="1011968717"/>
       </p:ext>
     </p:extLst>
   </p:cSld>
@@ -354,7 +354,7 @@
           <p:cNvPr id="2" name="タイトル 1">
             <a:extLst>
               <a:ext uri="{FF2B5EF4-FFF2-40B4-BE49-F238E27FC236}">
-                <a16:creationId xmlns:a16="http://schemas.microsoft.com/office/drawing/2014/main" id="{2C762CBA-F355-B595-B0E9-0A14E2E4BBFD}"/>
+                <a16:creationId xmlns:a16="http://schemas.microsoft.com/office/drawing/2014/main" id="{EC2497E5-D25F-479A-5B6B-B41EB20AF54B}"/>
               </a:ext>
             </a:extLst>
           </p:cNvPr>
@@ -382,7 +382,7 @@
           <p:cNvPr id="3" name="縦書きテキスト プレースホルダー 2">
             <a:extLst>
               <a:ext uri="{FF2B5EF4-FFF2-40B4-BE49-F238E27FC236}">
-                <a16:creationId xmlns:a16="http://schemas.microsoft.com/office/drawing/2014/main" id="{C1B41A51-8D58-1A19-D2DD-45B6E98D4DD5}"/>
+                <a16:creationId xmlns:a16="http://schemas.microsoft.com/office/drawing/2014/main" id="{FAE46A7F-3419-7BAE-7653-36282AED316F}"/>
               </a:ext>
             </a:extLst>
           </p:cNvPr>
@@ -471,7 +471,7 @@
           <p:cNvPr id="4" name="日付プレースホルダー 3">
             <a:extLst>
               <a:ext uri="{FF2B5EF4-FFF2-40B4-BE49-F238E27FC236}">
-                <a16:creationId xmlns:a16="http://schemas.microsoft.com/office/drawing/2014/main" id="{74AA23C6-344D-6489-2CFD-B2DC0E3B0902}"/>
+                <a16:creationId xmlns:a16="http://schemas.microsoft.com/office/drawing/2014/main" id="{D2891E49-FF51-C5F7-A69B-A5A28DF65799}"/>
               </a:ext>
             </a:extLst>
           </p:cNvPr>
@@ -487,7 +487,7 @@
           <a:bodyPr/>
           <a:lstStyle/>
           <a:p>
-            <a:fld id="{6B89269D-720E-49DD-8907-60321152CD14}" type="datetimeFigureOut">
+            <a:fld id="{A3DF16B0-CA0C-4E62-8286-BA216E1CFE48}" type="datetimeFigureOut">
               <a:rPr kumimoji="1" lang="ja-JP" altLang="en-US" smtClean="0"/>
               <a:t>2026/7/30</a:t>
             </a:fld>
@@ -500,7 +500,7 @@
           <p:cNvPr id="5" name="フッター プレースホルダー 4">
             <a:extLst>
               <a:ext uri="{FF2B5EF4-FFF2-40B4-BE49-F238E27FC236}">
-                <a16:creationId xmlns:a16="http://schemas.microsoft.com/office/drawing/2014/main" id="{A68E4D1C-7810-76DA-71B5-D0E2DD9B308C}"/>
+                <a16:creationId xmlns:a16="http://schemas.microsoft.com/office/drawing/2014/main" id="{7D5E38A5-0644-0521-AA55-DB16854F6DC6}"/>
               </a:ext>
             </a:extLst>
           </p:cNvPr>
@@ -525,7 +525,7 @@
           <p:cNvPr id="6" name="スライド番号プレースホルダー 5">
             <a:extLst>
               <a:ext uri="{FF2B5EF4-FFF2-40B4-BE49-F238E27FC236}">
-                <a16:creationId xmlns:a16="http://schemas.microsoft.com/office/drawing/2014/main" id="{7149079B-8342-1DC6-2F15-696FBD8CCF3A}"/>
+                <a16:creationId xmlns:a16="http://schemas.microsoft.com/office/drawing/2014/main" id="{9B83AD4E-BA36-F0FE-4C49-B677D961F9F5}"/>
               </a:ext>
             </a:extLst>
           </p:cNvPr>
@@ -541,7 +541,7 @@
           <a:bodyPr/>
           <a:lstStyle/>
           <a:p>
-            <a:fld id="{C8B7375D-A02E-4A21-9363-A09D1752CEA3}" type="slidenum">
+            <a:fld id="{921CBC5F-5F50-422D-AD0D-82B6CA84F60E}" type="slidenum">
               <a:rPr kumimoji="1" lang="ja-JP" altLang="en-US" smtClean="0"/>
               <a:t>‹#›</a:t>
             </a:fld>
@@ -552,7 +552,7 @@
     </p:spTree>
     <p:extLst>
       <p:ext uri="{BB962C8B-B14F-4D97-AF65-F5344CB8AC3E}">
-        <p14:creationId xmlns:p14="http://schemas.microsoft.com/office/powerpoint/2010/main" val="172916692"/>
+        <p14:creationId xmlns:p14="http://schemas.microsoft.com/office/powerpoint/2010/main" val="1092183773"/>
       </p:ext>
     </p:extLst>
   </p:cSld>
@@ -584,7 +584,7 @@
           <p:cNvPr id="2" name="縦書きタイトル 1">
             <a:extLst>
               <a:ext uri="{FF2B5EF4-FFF2-40B4-BE49-F238E27FC236}">
-                <a16:creationId xmlns:a16="http://schemas.microsoft.com/office/drawing/2014/main" id="{90E23B6B-0DA9-4C09-5A54-9B5111826B96}"/>
+                <a16:creationId xmlns:a16="http://schemas.microsoft.com/office/drawing/2014/main" id="{2356C36C-986F-A25A-E245-E217C6A2F2AC}"/>
               </a:ext>
             </a:extLst>
           </p:cNvPr>
@@ -617,7 +617,7 @@
           <p:cNvPr id="3" name="縦書きテキスト プレースホルダー 2">
             <a:extLst>
               <a:ext uri="{FF2B5EF4-FFF2-40B4-BE49-F238E27FC236}">
-                <a16:creationId xmlns:a16="http://schemas.microsoft.com/office/drawing/2014/main" id="{DF0110A0-8D8F-D543-BDAB-7CFE1DFA1FF0}"/>
+                <a16:creationId xmlns:a16="http://schemas.microsoft.com/office/drawing/2014/main" id="{4B354B2E-8901-2292-52A0-B0DB8DDF8E7F}"/>
               </a:ext>
             </a:extLst>
           </p:cNvPr>
@@ -711,7 +711,7 @@
           <p:cNvPr id="4" name="日付プレースホルダー 3">
             <a:extLst>
               <a:ext uri="{FF2B5EF4-FFF2-40B4-BE49-F238E27FC236}">
-                <a16:creationId xmlns:a16="http://schemas.microsoft.com/office/drawing/2014/main" id="{F51E9F76-B2C2-B2A1-5FBB-43CEEBBF0309}"/>
+                <a16:creationId xmlns:a16="http://schemas.microsoft.com/office/drawing/2014/main" id="{83D9C036-48FA-F7A2-0573-17517C72D22B}"/>
               </a:ext>
             </a:extLst>
           </p:cNvPr>
@@ -727,7 +727,7 @@
           <a:bodyPr/>
           <a:lstStyle/>
           <a:p>
-            <a:fld id="{6B89269D-720E-49DD-8907-60321152CD14}" type="datetimeFigureOut">
+            <a:fld id="{A3DF16B0-CA0C-4E62-8286-BA216E1CFE48}" type="datetimeFigureOut">
               <a:rPr kumimoji="1" lang="ja-JP" altLang="en-US" smtClean="0"/>
               <a:t>2026/7/30</a:t>
             </a:fld>
@@ -740,7 +740,7 @@
           <p:cNvPr id="5" name="フッター プレースホルダー 4">
             <a:extLst>
               <a:ext uri="{FF2B5EF4-FFF2-40B4-BE49-F238E27FC236}">
-                <a16:creationId xmlns:a16="http://schemas.microsoft.com/office/drawing/2014/main" id="{12DD194B-B514-CD2D-498C-50D62CEB59B4}"/>
+                <a16:creationId xmlns:a16="http://schemas.microsoft.com/office/drawing/2014/main" id="{8D61108D-08F2-79F5-362B-AEC5E48E7D6B}"/>
               </a:ext>
             </a:extLst>
           </p:cNvPr>
@@ -765,7 +765,7 @@
           <p:cNvPr id="6" name="スライド番号プレースホルダー 5">
             <a:extLst>
               <a:ext uri="{FF2B5EF4-FFF2-40B4-BE49-F238E27FC236}">
-                <a16:creationId xmlns:a16="http://schemas.microsoft.com/office/drawing/2014/main" id="{DE8FE963-D719-1B70-8EC7-E92EF48BD17A}"/>
+                <a16:creationId xmlns:a16="http://schemas.microsoft.com/office/drawing/2014/main" id="{163BAA25-F76B-E5C6-117A-05FC808E06EA}"/>
               </a:ext>
             </a:extLst>
           </p:cNvPr>
@@ -781,7 +781,7 @@
           <a:bodyPr/>
           <a:lstStyle/>
           <a:p>
-            <a:fld id="{C8B7375D-A02E-4A21-9363-A09D1752CEA3}" type="slidenum">
+            <a:fld id="{921CBC5F-5F50-422D-AD0D-82B6CA84F60E}" type="slidenum">
               <a:rPr kumimoji="1" lang="ja-JP" altLang="en-US" smtClean="0"/>
               <a:t>‹#›</a:t>
             </a:fld>
@@ -792,7 +792,7 @@
     </p:spTree>
     <p:extLst>
       <p:ext uri="{BB962C8B-B14F-4D97-AF65-F5344CB8AC3E}">
-        <p14:creationId xmlns:p14="http://schemas.microsoft.com/office/powerpoint/2010/main" val="2893823648"/>
+        <p14:creationId xmlns:p14="http://schemas.microsoft.com/office/powerpoint/2010/main" val="1444863627"/>
       </p:ext>
     </p:extLst>
   </p:cSld>
@@ -824,7 +824,7 @@
           <p:cNvPr id="2" name="タイトル 1">
             <a:extLst>
               <a:ext uri="{FF2B5EF4-FFF2-40B4-BE49-F238E27FC236}">
-                <a16:creationId xmlns:a16="http://schemas.microsoft.com/office/drawing/2014/main" id="{6293B71A-702E-B0B3-3668-9DDD6AF64105}"/>
+                <a16:creationId xmlns:a16="http://schemas.microsoft.com/office/drawing/2014/main" id="{83B06DB7-A75A-D573-DD22-B322A5ADE856}"/>
               </a:ext>
             </a:extLst>
           </p:cNvPr>
@@ -852,7 +852,7 @@
           <p:cNvPr id="3" name="コンテンツ プレースホルダー 2">
             <a:extLst>
               <a:ext uri="{FF2B5EF4-FFF2-40B4-BE49-F238E27FC236}">
-                <a16:creationId xmlns:a16="http://schemas.microsoft.com/office/drawing/2014/main" id="{B270C8B6-DE97-DAD0-4C81-DF2349B665B6}"/>
+                <a16:creationId xmlns:a16="http://schemas.microsoft.com/office/drawing/2014/main" id="{BE02DEB2-0203-57B5-8620-66EBD4AA48BE}"/>
               </a:ext>
             </a:extLst>
           </p:cNvPr>
@@ -941,7 +941,7 @@
           <p:cNvPr id="4" name="日付プレースホルダー 3">
             <a:extLst>
               <a:ext uri="{FF2B5EF4-FFF2-40B4-BE49-F238E27FC236}">
-                <a16:creationId xmlns:a16="http://schemas.microsoft.com/office/drawing/2014/main" id="{B07604A5-6986-4F82-5736-AD732FC01DB3}"/>
+                <a16:creationId xmlns:a16="http://schemas.microsoft.com/office/drawing/2014/main" id="{94B71EF1-A789-A8E9-8813-6FCEB07A8235}"/>
               </a:ext>
             </a:extLst>
           </p:cNvPr>
@@ -957,7 +957,7 @@
           <a:bodyPr/>
           <a:lstStyle/>
           <a:p>
-            <a:fld id="{6B89269D-720E-49DD-8907-60321152CD14}" type="datetimeFigureOut">
+            <a:fld id="{A3DF16B0-CA0C-4E62-8286-BA216E1CFE48}" type="datetimeFigureOut">
               <a:rPr kumimoji="1" lang="ja-JP" altLang="en-US" smtClean="0"/>
               <a:t>2026/7/30</a:t>
             </a:fld>
@@ -970,7 +970,7 @@
           <p:cNvPr id="5" name="フッター プレースホルダー 4">
             <a:extLst>
               <a:ext uri="{FF2B5EF4-FFF2-40B4-BE49-F238E27FC236}">
-                <a16:creationId xmlns:a16="http://schemas.microsoft.com/office/drawing/2014/main" id="{A09EFC28-9806-B75F-0B83-0203A30C728B}"/>
+                <a16:creationId xmlns:a16="http://schemas.microsoft.com/office/drawing/2014/main" id="{4F04848A-8AB5-A4A0-437D-CD50351667C0}"/>
               </a:ext>
             </a:extLst>
           </p:cNvPr>
@@ -995,7 +995,7 @@
           <p:cNvPr id="6" name="スライド番号プレースホルダー 5">
             <a:extLst>
               <a:ext uri="{FF2B5EF4-FFF2-40B4-BE49-F238E27FC236}">
-                <a16:creationId xmlns:a16="http://schemas.microsoft.com/office/drawing/2014/main" id="{954328C8-2597-95C1-6FE0-82875CAF75FA}"/>
+                <a16:creationId xmlns:a16="http://schemas.microsoft.com/office/drawing/2014/main" id="{5A936C78-9A6D-04AE-E150-8506F136583E}"/>
               </a:ext>
             </a:extLst>
           </p:cNvPr>
@@ -1011,7 +1011,7 @@
           <a:bodyPr/>
           <a:lstStyle/>
           <a:p>
-            <a:fld id="{C8B7375D-A02E-4A21-9363-A09D1752CEA3}" type="slidenum">
+            <a:fld id="{921CBC5F-5F50-422D-AD0D-82B6CA84F60E}" type="slidenum">
               <a:rPr kumimoji="1" lang="ja-JP" altLang="en-US" smtClean="0"/>
               <a:t>‹#›</a:t>
             </a:fld>
@@ -1022,7 +1022,7 @@
     </p:spTree>
     <p:extLst>
       <p:ext uri="{BB962C8B-B14F-4D97-AF65-F5344CB8AC3E}">
-        <p14:creationId xmlns:p14="http://schemas.microsoft.com/office/powerpoint/2010/main" val="1235160571"/>
+        <p14:creationId xmlns:p14="http://schemas.microsoft.com/office/powerpoint/2010/main" val="2603067986"/>
       </p:ext>
     </p:extLst>
   </p:cSld>
@@ -1054,7 +1054,7 @@
           <p:cNvPr id="2" name="タイトル 1">
             <a:extLst>
               <a:ext uri="{FF2B5EF4-FFF2-40B4-BE49-F238E27FC236}">
-                <a16:creationId xmlns:a16="http://schemas.microsoft.com/office/drawing/2014/main" id="{830C8494-6344-0EBB-0601-68B03063E971}"/>
+                <a16:creationId xmlns:a16="http://schemas.microsoft.com/office/drawing/2014/main" id="{19980564-FCFA-C0B3-EE4F-4C776F2A1648}"/>
               </a:ext>
             </a:extLst>
           </p:cNvPr>
@@ -1091,7 +1091,7 @@
           <p:cNvPr id="3" name="テキスト プレースホルダー 2">
             <a:extLst>
               <a:ext uri="{FF2B5EF4-FFF2-40B4-BE49-F238E27FC236}">
-                <a16:creationId xmlns:a16="http://schemas.microsoft.com/office/drawing/2014/main" id="{5EA25598-76FA-C47C-8547-4A18F7DC0D0A}"/>
+                <a16:creationId xmlns:a16="http://schemas.microsoft.com/office/drawing/2014/main" id="{32EBE4A2-FC1C-C32D-9AB8-CB783A2715DD}"/>
               </a:ext>
             </a:extLst>
           </p:cNvPr>
@@ -1216,7 +1216,7 @@
           <p:cNvPr id="4" name="日付プレースホルダー 3">
             <a:extLst>
               <a:ext uri="{FF2B5EF4-FFF2-40B4-BE49-F238E27FC236}">
-                <a16:creationId xmlns:a16="http://schemas.microsoft.com/office/drawing/2014/main" id="{F0CDF4F9-8EEE-E168-3BAD-7ABC82281B42}"/>
+                <a16:creationId xmlns:a16="http://schemas.microsoft.com/office/drawing/2014/main" id="{FF680BA0-4FF0-5A26-E077-37BC138CD341}"/>
               </a:ext>
             </a:extLst>
           </p:cNvPr>
@@ -1232,7 +1232,7 @@
           <a:bodyPr/>
           <a:lstStyle/>
           <a:p>
-            <a:fld id="{6B89269D-720E-49DD-8907-60321152CD14}" type="datetimeFigureOut">
+            <a:fld id="{A3DF16B0-CA0C-4E62-8286-BA216E1CFE48}" type="datetimeFigureOut">
               <a:rPr kumimoji="1" lang="ja-JP" altLang="en-US" smtClean="0"/>
               <a:t>2026/7/30</a:t>
             </a:fld>
@@ -1245,7 +1245,7 @@
           <p:cNvPr id="5" name="フッター プレースホルダー 4">
             <a:extLst>
               <a:ext uri="{FF2B5EF4-FFF2-40B4-BE49-F238E27FC236}">
-                <a16:creationId xmlns:a16="http://schemas.microsoft.com/office/drawing/2014/main" id="{A897EC67-81F7-6B64-AC73-29B10E2EF009}"/>
+                <a16:creationId xmlns:a16="http://schemas.microsoft.com/office/drawing/2014/main" id="{C03FA4C4-3565-FB83-EC93-360F4B6A2401}"/>
               </a:ext>
             </a:extLst>
           </p:cNvPr>
@@ -1270,7 +1270,7 @@
           <p:cNvPr id="6" name="スライド番号プレースホルダー 5">
             <a:extLst>
               <a:ext uri="{FF2B5EF4-FFF2-40B4-BE49-F238E27FC236}">
-                <a16:creationId xmlns:a16="http://schemas.microsoft.com/office/drawing/2014/main" id="{A63B3ACF-AC0F-93E5-9C21-C0123B4B779D}"/>
+                <a16:creationId xmlns:a16="http://schemas.microsoft.com/office/drawing/2014/main" id="{394ABDB1-EB68-0DEB-91D8-02F043EE440E}"/>
               </a:ext>
             </a:extLst>
           </p:cNvPr>
@@ -1286,7 +1286,7 @@
           <a:bodyPr/>
           <a:lstStyle/>
           <a:p>
-            <a:fld id="{C8B7375D-A02E-4A21-9363-A09D1752CEA3}" type="slidenum">
+            <a:fld id="{921CBC5F-5F50-422D-AD0D-82B6CA84F60E}" type="slidenum">
               <a:rPr kumimoji="1" lang="ja-JP" altLang="en-US" smtClean="0"/>
               <a:t>‹#›</a:t>
             </a:fld>
@@ -1297,7 +1297,7 @@
     </p:spTree>
     <p:extLst>
       <p:ext uri="{BB962C8B-B14F-4D97-AF65-F5344CB8AC3E}">
-        <p14:creationId xmlns:p14="http://schemas.microsoft.com/office/powerpoint/2010/main" val="1928234474"/>
+        <p14:creationId xmlns:p14="http://schemas.microsoft.com/office/powerpoint/2010/main" val="3124293305"/>
       </p:ext>
     </p:extLst>
   </p:cSld>
@@ -1329,7 +1329,7 @@
           <p:cNvPr id="2" name="タイトル 1">
             <a:extLst>
               <a:ext uri="{FF2B5EF4-FFF2-40B4-BE49-F238E27FC236}">
-                <a16:creationId xmlns:a16="http://schemas.microsoft.com/office/drawing/2014/main" id="{8D479FAB-2805-11B3-3A7B-9052E7A56F50}"/>
+                <a16:creationId xmlns:a16="http://schemas.microsoft.com/office/drawing/2014/main" id="{1DA1E935-A607-137A-77B0-970034322E92}"/>
               </a:ext>
             </a:extLst>
           </p:cNvPr>
@@ -1357,7 +1357,7 @@
           <p:cNvPr id="3" name="コンテンツ プレースホルダー 2">
             <a:extLst>
               <a:ext uri="{FF2B5EF4-FFF2-40B4-BE49-F238E27FC236}">
-                <a16:creationId xmlns:a16="http://schemas.microsoft.com/office/drawing/2014/main" id="{6BC74EA0-92D4-5775-46F0-9780D5452A4E}"/>
+                <a16:creationId xmlns:a16="http://schemas.microsoft.com/office/drawing/2014/main" id="{6E465CF2-1665-00DC-04B2-27FF50DBB26F}"/>
               </a:ext>
             </a:extLst>
           </p:cNvPr>
@@ -1451,7 +1451,7 @@
           <p:cNvPr id="4" name="コンテンツ プレースホルダー 3">
             <a:extLst>
               <a:ext uri="{FF2B5EF4-FFF2-40B4-BE49-F238E27FC236}">
-                <a16:creationId xmlns:a16="http://schemas.microsoft.com/office/drawing/2014/main" id="{60A382D4-608E-6329-2308-CB5C32A3C797}"/>
+                <a16:creationId xmlns:a16="http://schemas.microsoft.com/office/drawing/2014/main" id="{B2D06E83-55EC-C5C1-8793-84E588FF22CF}"/>
               </a:ext>
             </a:extLst>
           </p:cNvPr>
@@ -1545,7 +1545,7 @@
           <p:cNvPr id="5" name="日付プレースホルダー 4">
             <a:extLst>
               <a:ext uri="{FF2B5EF4-FFF2-40B4-BE49-F238E27FC236}">
-                <a16:creationId xmlns:a16="http://schemas.microsoft.com/office/drawing/2014/main" id="{720F66C4-C471-BD51-907D-136AAAE44EBC}"/>
+                <a16:creationId xmlns:a16="http://schemas.microsoft.com/office/drawing/2014/main" id="{DD1D6B92-40FD-76D8-93C8-A1E146A3BB22}"/>
               </a:ext>
             </a:extLst>
           </p:cNvPr>
@@ -1561,7 +1561,7 @@
           <a:bodyPr/>
           <a:lstStyle/>
           <a:p>
-            <a:fld id="{6B89269D-720E-49DD-8907-60321152CD14}" type="datetimeFigureOut">
+            <a:fld id="{A3DF16B0-CA0C-4E62-8286-BA216E1CFE48}" type="datetimeFigureOut">
               <a:rPr kumimoji="1" lang="ja-JP" altLang="en-US" smtClean="0"/>
               <a:t>2026/7/30</a:t>
             </a:fld>
@@ -1574,7 +1574,7 @@
           <p:cNvPr id="6" name="フッター プレースホルダー 5">
             <a:extLst>
               <a:ext uri="{FF2B5EF4-FFF2-40B4-BE49-F238E27FC236}">
-                <a16:creationId xmlns:a16="http://schemas.microsoft.com/office/drawing/2014/main" id="{9494353A-5C85-2F16-A46F-306B9AAE6397}"/>
+                <a16:creationId xmlns:a16="http://schemas.microsoft.com/office/drawing/2014/main" id="{0451797E-2EDD-EE15-FDF8-3F3C0032A249}"/>
               </a:ext>
             </a:extLst>
           </p:cNvPr>
@@ -1599,7 +1599,7 @@
           <p:cNvPr id="7" name="スライド番号プレースホルダー 6">
             <a:extLst>
               <a:ext uri="{FF2B5EF4-FFF2-40B4-BE49-F238E27FC236}">
-                <a16:creationId xmlns:a16="http://schemas.microsoft.com/office/drawing/2014/main" id="{0791000D-4965-9751-0794-DF9EB3C1F918}"/>
+                <a16:creationId xmlns:a16="http://schemas.microsoft.com/office/drawing/2014/main" id="{42D146A9-EB7A-11A8-091F-858A32D3D856}"/>
               </a:ext>
             </a:extLst>
           </p:cNvPr>
@@ -1615,7 +1615,7 @@
           <a:bodyPr/>
           <a:lstStyle/>
           <a:p>
-            <a:fld id="{C8B7375D-A02E-4A21-9363-A09D1752CEA3}" type="slidenum">
+            <a:fld id="{921CBC5F-5F50-422D-AD0D-82B6CA84F60E}" type="slidenum">
               <a:rPr kumimoji="1" lang="ja-JP" altLang="en-US" smtClean="0"/>
               <a:t>‹#›</a:t>
             </a:fld>
@@ -1626,7 +1626,7 @@
     </p:spTree>
     <p:extLst>
       <p:ext uri="{BB962C8B-B14F-4D97-AF65-F5344CB8AC3E}">
-        <p14:creationId xmlns:p14="http://schemas.microsoft.com/office/powerpoint/2010/main" val="697283165"/>
+        <p14:creationId xmlns:p14="http://schemas.microsoft.com/office/powerpoint/2010/main" val="4242814516"/>
       </p:ext>
     </p:extLst>
   </p:cSld>
@@ -1658,7 +1658,7 @@
           <p:cNvPr id="2" name="タイトル 1">
             <a:extLst>
               <a:ext uri="{FF2B5EF4-FFF2-40B4-BE49-F238E27FC236}">
-                <a16:creationId xmlns:a16="http://schemas.microsoft.com/office/drawing/2014/main" id="{83A57F86-50DC-0D30-DED1-050142D6648A}"/>
+                <a16:creationId xmlns:a16="http://schemas.microsoft.com/office/drawing/2014/main" id="{4570FB4B-7F75-61BA-6068-5172596D5D72}"/>
               </a:ext>
             </a:extLst>
           </p:cNvPr>
@@ -1691,7 +1691,7 @@
           <p:cNvPr id="3" name="テキスト プレースホルダー 2">
             <a:extLst>
               <a:ext uri="{FF2B5EF4-FFF2-40B4-BE49-F238E27FC236}">
-                <a16:creationId xmlns:a16="http://schemas.microsoft.com/office/drawing/2014/main" id="{09C7829B-C34D-6506-D6EB-2580DD8A3E02}"/>
+                <a16:creationId xmlns:a16="http://schemas.microsoft.com/office/drawing/2014/main" id="{8A667072-3BB4-0870-C824-26EF998EFA86}"/>
               </a:ext>
             </a:extLst>
           </p:cNvPr>
@@ -1762,7 +1762,7 @@
           <p:cNvPr id="4" name="コンテンツ プレースホルダー 3">
             <a:extLst>
               <a:ext uri="{FF2B5EF4-FFF2-40B4-BE49-F238E27FC236}">
-                <a16:creationId xmlns:a16="http://schemas.microsoft.com/office/drawing/2014/main" id="{8A5A9EFA-B85E-E095-0A5A-8ACEEE05052C}"/>
+                <a16:creationId xmlns:a16="http://schemas.microsoft.com/office/drawing/2014/main" id="{C27428CE-DF08-BE7A-232A-45DA4AF08F00}"/>
               </a:ext>
             </a:extLst>
           </p:cNvPr>
@@ -1856,7 +1856,7 @@
           <p:cNvPr id="5" name="テキスト プレースホルダー 4">
             <a:extLst>
               <a:ext uri="{FF2B5EF4-FFF2-40B4-BE49-F238E27FC236}">
-                <a16:creationId xmlns:a16="http://schemas.microsoft.com/office/drawing/2014/main" id="{3059ED89-02B8-300B-CBD5-466690EA0DAF}"/>
+                <a16:creationId xmlns:a16="http://schemas.microsoft.com/office/drawing/2014/main" id="{187E82F5-9774-82AD-F1A9-0321EE7248FC}"/>
               </a:ext>
             </a:extLst>
           </p:cNvPr>
@@ -1927,7 +1927,7 @@
           <p:cNvPr id="6" name="コンテンツ プレースホルダー 5">
             <a:extLst>
               <a:ext uri="{FF2B5EF4-FFF2-40B4-BE49-F238E27FC236}">
-                <a16:creationId xmlns:a16="http://schemas.microsoft.com/office/drawing/2014/main" id="{7D5F9A59-CCCB-E983-3DF8-2791D0354A49}"/>
+                <a16:creationId xmlns:a16="http://schemas.microsoft.com/office/drawing/2014/main" id="{C8B7D522-9DF7-B366-80E4-A443A7177711}"/>
               </a:ext>
             </a:extLst>
           </p:cNvPr>
@@ -2021,7 +2021,7 @@
           <p:cNvPr id="7" name="日付プレースホルダー 6">
             <a:extLst>
               <a:ext uri="{FF2B5EF4-FFF2-40B4-BE49-F238E27FC236}">
-                <a16:creationId xmlns:a16="http://schemas.microsoft.com/office/drawing/2014/main" id="{587001AF-1097-7134-CDA4-52F3FDFA2B9A}"/>
+                <a16:creationId xmlns:a16="http://schemas.microsoft.com/office/drawing/2014/main" id="{A3F01925-5AD3-FF99-93AB-B9A32B6B049F}"/>
               </a:ext>
             </a:extLst>
           </p:cNvPr>
@@ -2037,7 +2037,7 @@
           <a:bodyPr/>
           <a:lstStyle/>
           <a:p>
-            <a:fld id="{6B89269D-720E-49DD-8907-60321152CD14}" type="datetimeFigureOut">
+            <a:fld id="{A3DF16B0-CA0C-4E62-8286-BA216E1CFE48}" type="datetimeFigureOut">
               <a:rPr kumimoji="1" lang="ja-JP" altLang="en-US" smtClean="0"/>
               <a:t>2026/7/30</a:t>
             </a:fld>
@@ -2050,7 +2050,7 @@
           <p:cNvPr id="8" name="フッター プレースホルダー 7">
             <a:extLst>
               <a:ext uri="{FF2B5EF4-FFF2-40B4-BE49-F238E27FC236}">
-                <a16:creationId xmlns:a16="http://schemas.microsoft.com/office/drawing/2014/main" id="{ABB8BC70-7C96-5B5C-4C87-D593B85D4DF7}"/>
+                <a16:creationId xmlns:a16="http://schemas.microsoft.com/office/drawing/2014/main" id="{BEE2CA54-6326-9763-DC99-19125EA106D5}"/>
               </a:ext>
             </a:extLst>
           </p:cNvPr>
@@ -2075,7 +2075,7 @@
           <p:cNvPr id="9" name="スライド番号プレースホルダー 8">
             <a:extLst>
               <a:ext uri="{FF2B5EF4-FFF2-40B4-BE49-F238E27FC236}">
-                <a16:creationId xmlns:a16="http://schemas.microsoft.com/office/drawing/2014/main" id="{A684BB35-B81B-DB42-80FF-2C1784B623A2}"/>
+                <a16:creationId xmlns:a16="http://schemas.microsoft.com/office/drawing/2014/main" id="{2C9CBED8-2C0F-328E-F072-20198B47FACE}"/>
               </a:ext>
             </a:extLst>
           </p:cNvPr>
@@ -2091,7 +2091,7 @@
           <a:bodyPr/>
           <a:lstStyle/>
           <a:p>
-            <a:fld id="{C8B7375D-A02E-4A21-9363-A09D1752CEA3}" type="slidenum">
+            <a:fld id="{921CBC5F-5F50-422D-AD0D-82B6CA84F60E}" type="slidenum">
               <a:rPr kumimoji="1" lang="ja-JP" altLang="en-US" smtClean="0"/>
               <a:t>‹#›</a:t>
             </a:fld>
@@ -2102,7 +2102,7 @@
     </p:spTree>
     <p:extLst>
       <p:ext uri="{BB962C8B-B14F-4D97-AF65-F5344CB8AC3E}">
-        <p14:creationId xmlns:p14="http://schemas.microsoft.com/office/powerpoint/2010/main" val="1284871004"/>
+        <p14:creationId xmlns:p14="http://schemas.microsoft.com/office/powerpoint/2010/main" val="191973434"/>
       </p:ext>
     </p:extLst>
   </p:cSld>
@@ -2134,7 +2134,7 @@
           <p:cNvPr id="2" name="タイトル 1">
             <a:extLst>
               <a:ext uri="{FF2B5EF4-FFF2-40B4-BE49-F238E27FC236}">
-                <a16:creationId xmlns:a16="http://schemas.microsoft.com/office/drawing/2014/main" id="{59DEC2B7-185F-C8E2-F70D-4E392F7B14AA}"/>
+                <a16:creationId xmlns:a16="http://schemas.microsoft.com/office/drawing/2014/main" id="{1E9F5065-E03A-C624-E369-01F177793846}"/>
               </a:ext>
             </a:extLst>
           </p:cNvPr>
@@ -2162,7 +2162,7 @@
           <p:cNvPr id="3" name="日付プレースホルダー 2">
             <a:extLst>
               <a:ext uri="{FF2B5EF4-FFF2-40B4-BE49-F238E27FC236}">
-                <a16:creationId xmlns:a16="http://schemas.microsoft.com/office/drawing/2014/main" id="{E6765C39-997A-5F64-FF00-12515FBB9BA6}"/>
+                <a16:creationId xmlns:a16="http://schemas.microsoft.com/office/drawing/2014/main" id="{B0B72DD7-18CC-CF6C-7590-8FCD30D2020A}"/>
               </a:ext>
             </a:extLst>
           </p:cNvPr>
@@ -2178,7 +2178,7 @@
           <a:bodyPr/>
           <a:lstStyle/>
           <a:p>
-            <a:fld id="{6B89269D-720E-49DD-8907-60321152CD14}" type="datetimeFigureOut">
+            <a:fld id="{A3DF16B0-CA0C-4E62-8286-BA216E1CFE48}" type="datetimeFigureOut">
               <a:rPr kumimoji="1" lang="ja-JP" altLang="en-US" smtClean="0"/>
               <a:t>2026/7/30</a:t>
             </a:fld>
@@ -2191,7 +2191,7 @@
           <p:cNvPr id="4" name="フッター プレースホルダー 3">
             <a:extLst>
               <a:ext uri="{FF2B5EF4-FFF2-40B4-BE49-F238E27FC236}">
-                <a16:creationId xmlns:a16="http://schemas.microsoft.com/office/drawing/2014/main" id="{0F374B59-4DA9-4582-3345-394C5306FD1E}"/>
+                <a16:creationId xmlns:a16="http://schemas.microsoft.com/office/drawing/2014/main" id="{A909E303-C580-4C53-00F9-D3AE69844387}"/>
               </a:ext>
             </a:extLst>
           </p:cNvPr>
@@ -2216,7 +2216,7 @@
           <p:cNvPr id="5" name="スライド番号プレースホルダー 4">
             <a:extLst>
               <a:ext uri="{FF2B5EF4-FFF2-40B4-BE49-F238E27FC236}">
-                <a16:creationId xmlns:a16="http://schemas.microsoft.com/office/drawing/2014/main" id="{C0AAE6AB-FCF7-B868-801B-638D938B2397}"/>
+                <a16:creationId xmlns:a16="http://schemas.microsoft.com/office/drawing/2014/main" id="{89C36D87-C7A6-4D9E-70A7-E29089594549}"/>
               </a:ext>
             </a:extLst>
           </p:cNvPr>
@@ -2232,7 +2232,7 @@
           <a:bodyPr/>
           <a:lstStyle/>
           <a:p>
-            <a:fld id="{C8B7375D-A02E-4A21-9363-A09D1752CEA3}" type="slidenum">
+            <a:fld id="{921CBC5F-5F50-422D-AD0D-82B6CA84F60E}" type="slidenum">
               <a:rPr kumimoji="1" lang="ja-JP" altLang="en-US" smtClean="0"/>
               <a:t>‹#›</a:t>
             </a:fld>
@@ -2243,7 +2243,7 @@
     </p:spTree>
     <p:extLst>
       <p:ext uri="{BB962C8B-B14F-4D97-AF65-F5344CB8AC3E}">
-        <p14:creationId xmlns:p14="http://schemas.microsoft.com/office/powerpoint/2010/main" val="4020187229"/>
+        <p14:creationId xmlns:p14="http://schemas.microsoft.com/office/powerpoint/2010/main" val="1685131650"/>
       </p:ext>
     </p:extLst>
   </p:cSld>
@@ -2275,7 +2275,7 @@
           <p:cNvPr id="2" name="日付プレースホルダー 1">
             <a:extLst>
               <a:ext uri="{FF2B5EF4-FFF2-40B4-BE49-F238E27FC236}">
-                <a16:creationId xmlns:a16="http://schemas.microsoft.com/office/drawing/2014/main" id="{0F6E1F51-7CD8-C051-BA45-C96FF52A53A0}"/>
+                <a16:creationId xmlns:a16="http://schemas.microsoft.com/office/drawing/2014/main" id="{F15FD113-983D-3D0D-6792-284FE102699B}"/>
               </a:ext>
             </a:extLst>
           </p:cNvPr>
@@ -2291,7 +2291,7 @@
           <a:bodyPr/>
           <a:lstStyle/>
           <a:p>
-            <a:fld id="{6B89269D-720E-49DD-8907-60321152CD14}" type="datetimeFigureOut">
+            <a:fld id="{A3DF16B0-CA0C-4E62-8286-BA216E1CFE48}" type="datetimeFigureOut">
               <a:rPr kumimoji="1" lang="ja-JP" altLang="en-US" smtClean="0"/>
               <a:t>2026/7/30</a:t>
             </a:fld>
@@ -2304,7 +2304,7 @@
           <p:cNvPr id="3" name="フッター プレースホルダー 2">
             <a:extLst>
               <a:ext uri="{FF2B5EF4-FFF2-40B4-BE49-F238E27FC236}">
-                <a16:creationId xmlns:a16="http://schemas.microsoft.com/office/drawing/2014/main" id="{12D56AE0-80E6-9131-243A-CF6CC1684427}"/>
+                <a16:creationId xmlns:a16="http://schemas.microsoft.com/office/drawing/2014/main" id="{B168FEE5-9059-9BC0-31F3-E6EBE4C82819}"/>
               </a:ext>
             </a:extLst>
           </p:cNvPr>
@@ -2329,7 +2329,7 @@
           <p:cNvPr id="4" name="スライド番号プレースホルダー 3">
             <a:extLst>
               <a:ext uri="{FF2B5EF4-FFF2-40B4-BE49-F238E27FC236}">
-                <a16:creationId xmlns:a16="http://schemas.microsoft.com/office/drawing/2014/main" id="{7C18B562-62EA-E820-331E-347B4E200E31}"/>
+                <a16:creationId xmlns:a16="http://schemas.microsoft.com/office/drawing/2014/main" id="{650A8B69-79B4-7B09-CEEA-8A57A192AC0F}"/>
               </a:ext>
             </a:extLst>
           </p:cNvPr>
@@ -2345,7 +2345,7 @@
           <a:bodyPr/>
           <a:lstStyle/>
           <a:p>
-            <a:fld id="{C8B7375D-A02E-4A21-9363-A09D1752CEA3}" type="slidenum">
+            <a:fld id="{921CBC5F-5F50-422D-AD0D-82B6CA84F60E}" type="slidenum">
               <a:rPr kumimoji="1" lang="ja-JP" altLang="en-US" smtClean="0"/>
               <a:t>‹#›</a:t>
             </a:fld>
@@ -2356,7 +2356,7 @@
     </p:spTree>
     <p:extLst>
       <p:ext uri="{BB962C8B-B14F-4D97-AF65-F5344CB8AC3E}">
-        <p14:creationId xmlns:p14="http://schemas.microsoft.com/office/powerpoint/2010/main" val="244686097"/>
+        <p14:creationId xmlns:p14="http://schemas.microsoft.com/office/powerpoint/2010/main" val="247121996"/>
       </p:ext>
     </p:extLst>
   </p:cSld>
@@ -2388,7 +2388,7 @@
           <p:cNvPr id="2" name="タイトル 1">
             <a:extLst>
               <a:ext uri="{FF2B5EF4-FFF2-40B4-BE49-F238E27FC236}">
-                <a16:creationId xmlns:a16="http://schemas.microsoft.com/office/drawing/2014/main" id="{F1F30B3A-E24B-2792-F55A-23601DA44A94}"/>
+                <a16:creationId xmlns:a16="http://schemas.microsoft.com/office/drawing/2014/main" id="{F41254C2-2503-268F-2BBE-4AD85F2B4E84}"/>
               </a:ext>
             </a:extLst>
           </p:cNvPr>
@@ -2425,7 +2425,7 @@
           <p:cNvPr id="3" name="コンテンツ プレースホルダー 2">
             <a:extLst>
               <a:ext uri="{FF2B5EF4-FFF2-40B4-BE49-F238E27FC236}">
-                <a16:creationId xmlns:a16="http://schemas.microsoft.com/office/drawing/2014/main" id="{2D9BBDE6-3F8A-C5C3-6D65-C72B1E80D792}"/>
+                <a16:creationId xmlns:a16="http://schemas.microsoft.com/office/drawing/2014/main" id="{916A03EE-11A1-8CC4-81D8-2ADBF01F8E70}"/>
               </a:ext>
             </a:extLst>
           </p:cNvPr>
@@ -2547,7 +2547,7 @@
           <p:cNvPr id="4" name="テキスト プレースホルダー 3">
             <a:extLst>
               <a:ext uri="{FF2B5EF4-FFF2-40B4-BE49-F238E27FC236}">
-                <a16:creationId xmlns:a16="http://schemas.microsoft.com/office/drawing/2014/main" id="{EEF8D097-5E1E-2C8B-F8A6-04E7F20A7490}"/>
+                <a16:creationId xmlns:a16="http://schemas.microsoft.com/office/drawing/2014/main" id="{496B1998-27BE-7D95-6478-20BD52FA72A3}"/>
               </a:ext>
             </a:extLst>
           </p:cNvPr>
@@ -2618,7 +2618,7 @@
           <p:cNvPr id="5" name="日付プレースホルダー 4">
             <a:extLst>
               <a:ext uri="{FF2B5EF4-FFF2-40B4-BE49-F238E27FC236}">
-                <a16:creationId xmlns:a16="http://schemas.microsoft.com/office/drawing/2014/main" id="{16AAFA47-C84D-A491-D8F1-1723047010D7}"/>
+                <a16:creationId xmlns:a16="http://schemas.microsoft.com/office/drawing/2014/main" id="{0C0F40B7-9B8B-D3CE-20AD-0DDABCD3F446}"/>
               </a:ext>
             </a:extLst>
           </p:cNvPr>
@@ -2634,7 +2634,7 @@
           <a:bodyPr/>
           <a:lstStyle/>
           <a:p>
-            <a:fld id="{6B89269D-720E-49DD-8907-60321152CD14}" type="datetimeFigureOut">
+            <a:fld id="{A3DF16B0-CA0C-4E62-8286-BA216E1CFE48}" type="datetimeFigureOut">
               <a:rPr kumimoji="1" lang="ja-JP" altLang="en-US" smtClean="0"/>
               <a:t>2026/7/30</a:t>
             </a:fld>
@@ -2647,7 +2647,7 @@
           <p:cNvPr id="6" name="フッター プレースホルダー 5">
             <a:extLst>
               <a:ext uri="{FF2B5EF4-FFF2-40B4-BE49-F238E27FC236}">
-                <a16:creationId xmlns:a16="http://schemas.microsoft.com/office/drawing/2014/main" id="{ACB2454E-DD16-2EC5-85D0-FA22982FD0A8}"/>
+                <a16:creationId xmlns:a16="http://schemas.microsoft.com/office/drawing/2014/main" id="{984952CC-90E3-31EC-3F67-EDE4C97D6E69}"/>
               </a:ext>
             </a:extLst>
           </p:cNvPr>
@@ -2672,7 +2672,7 @@
           <p:cNvPr id="7" name="スライド番号プレースホルダー 6">
             <a:extLst>
               <a:ext uri="{FF2B5EF4-FFF2-40B4-BE49-F238E27FC236}">
-                <a16:creationId xmlns:a16="http://schemas.microsoft.com/office/drawing/2014/main" id="{EB435B2D-B3E3-4F73-12A7-3A4617DD9BB3}"/>
+                <a16:creationId xmlns:a16="http://schemas.microsoft.com/office/drawing/2014/main" id="{487D7149-7156-D0E7-7EDB-D690A3420A51}"/>
               </a:ext>
             </a:extLst>
           </p:cNvPr>
@@ -2688,7 +2688,7 @@
           <a:bodyPr/>
           <a:lstStyle/>
           <a:p>
-            <a:fld id="{C8B7375D-A02E-4A21-9363-A09D1752CEA3}" type="slidenum">
+            <a:fld id="{921CBC5F-5F50-422D-AD0D-82B6CA84F60E}" type="slidenum">
               <a:rPr kumimoji="1" lang="ja-JP" altLang="en-US" smtClean="0"/>
               <a:t>‹#›</a:t>
             </a:fld>
@@ -2699,7 +2699,7 @@
     </p:spTree>
     <p:extLst>
       <p:ext uri="{BB962C8B-B14F-4D97-AF65-F5344CB8AC3E}">
-        <p14:creationId xmlns:p14="http://schemas.microsoft.com/office/powerpoint/2010/main" val="2645528525"/>
+        <p14:creationId xmlns:p14="http://schemas.microsoft.com/office/powerpoint/2010/main" val="290935461"/>
       </p:ext>
     </p:extLst>
   </p:cSld>
@@ -2731,7 +2731,7 @@
           <p:cNvPr id="2" name="タイトル 1">
             <a:extLst>
               <a:ext uri="{FF2B5EF4-FFF2-40B4-BE49-F238E27FC236}">
-                <a16:creationId xmlns:a16="http://schemas.microsoft.com/office/drawing/2014/main" id="{DA891D18-9B5A-D4D9-DA42-DB51A7052A85}"/>
+                <a16:creationId xmlns:a16="http://schemas.microsoft.com/office/drawing/2014/main" id="{8B8CCB07-F98D-3AB0-4EC7-ED756DA3DD43}"/>
               </a:ext>
             </a:extLst>
           </p:cNvPr>
@@ -2768,7 +2768,7 @@
           <p:cNvPr id="3" name="図プレースホルダー 2">
             <a:extLst>
               <a:ext uri="{FF2B5EF4-FFF2-40B4-BE49-F238E27FC236}">
-                <a16:creationId xmlns:a16="http://schemas.microsoft.com/office/drawing/2014/main" id="{8CFFCE0A-98E4-8F74-8373-21521DF51209}"/>
+                <a16:creationId xmlns:a16="http://schemas.microsoft.com/office/drawing/2014/main" id="{9ADD807B-CB10-A527-2056-D150697DAECF}"/>
               </a:ext>
             </a:extLst>
           </p:cNvPr>
@@ -2835,7 +2835,7 @@
           <p:cNvPr id="4" name="テキスト プレースホルダー 3">
             <a:extLst>
               <a:ext uri="{FF2B5EF4-FFF2-40B4-BE49-F238E27FC236}">
-                <a16:creationId xmlns:a16="http://schemas.microsoft.com/office/drawing/2014/main" id="{AB8F6E83-BDF2-CCE2-E3EA-D24420C4BC78}"/>
+                <a16:creationId xmlns:a16="http://schemas.microsoft.com/office/drawing/2014/main" id="{E957F78B-74BB-B02A-8576-A37277C9B60A}"/>
               </a:ext>
             </a:extLst>
           </p:cNvPr>
@@ -2906,7 +2906,7 @@
           <p:cNvPr id="5" name="日付プレースホルダー 4">
             <a:extLst>
               <a:ext uri="{FF2B5EF4-FFF2-40B4-BE49-F238E27FC236}">
-                <a16:creationId xmlns:a16="http://schemas.microsoft.com/office/drawing/2014/main" id="{3665C18A-FBDA-5D09-B47D-FA3993EB0E03}"/>
+                <a16:creationId xmlns:a16="http://schemas.microsoft.com/office/drawing/2014/main" id="{29FB92FF-4F8E-AB9C-1096-86C0004C9368}"/>
               </a:ext>
             </a:extLst>
           </p:cNvPr>
@@ -2922,7 +2922,7 @@
           <a:bodyPr/>
           <a:lstStyle/>
           <a:p>
-            <a:fld id="{6B89269D-720E-49DD-8907-60321152CD14}" type="datetimeFigureOut">
+            <a:fld id="{A3DF16B0-CA0C-4E62-8286-BA216E1CFE48}" type="datetimeFigureOut">
               <a:rPr kumimoji="1" lang="ja-JP" altLang="en-US" smtClean="0"/>
               <a:t>2026/7/30</a:t>
             </a:fld>
@@ -2935,7 +2935,7 @@
           <p:cNvPr id="6" name="フッター プレースホルダー 5">
             <a:extLst>
               <a:ext uri="{FF2B5EF4-FFF2-40B4-BE49-F238E27FC236}">
-                <a16:creationId xmlns:a16="http://schemas.microsoft.com/office/drawing/2014/main" id="{9A5FFA63-29A6-F6F2-30C0-A78F69DF942F}"/>
+                <a16:creationId xmlns:a16="http://schemas.microsoft.com/office/drawing/2014/main" id="{449E8CB5-21B6-6E15-91E4-DF24FFD9FF45}"/>
               </a:ext>
             </a:extLst>
           </p:cNvPr>
@@ -2960,7 +2960,7 @@
           <p:cNvPr id="7" name="スライド番号プレースホルダー 6">
             <a:extLst>
               <a:ext uri="{FF2B5EF4-FFF2-40B4-BE49-F238E27FC236}">
-                <a16:creationId xmlns:a16="http://schemas.microsoft.com/office/drawing/2014/main" id="{ADFAD6A4-15D0-7DE6-65AD-F6111D357C9D}"/>
+                <a16:creationId xmlns:a16="http://schemas.microsoft.com/office/drawing/2014/main" id="{FC438AF1-9EB1-B88A-5D32-FFEE7DD6AF16}"/>
               </a:ext>
             </a:extLst>
           </p:cNvPr>
@@ -2976,7 +2976,7 @@
           <a:bodyPr/>
           <a:lstStyle/>
           <a:p>
-            <a:fld id="{C8B7375D-A02E-4A21-9363-A09D1752CEA3}" type="slidenum">
+            <a:fld id="{921CBC5F-5F50-422D-AD0D-82B6CA84F60E}" type="slidenum">
               <a:rPr kumimoji="1" lang="ja-JP" altLang="en-US" smtClean="0"/>
               <a:t>‹#›</a:t>
             </a:fld>
@@ -2987,7 +2987,7 @@
     </p:spTree>
     <p:extLst>
       <p:ext uri="{BB962C8B-B14F-4D97-AF65-F5344CB8AC3E}">
-        <p14:creationId xmlns:p14="http://schemas.microsoft.com/office/powerpoint/2010/main" val="2237415716"/>
+        <p14:creationId xmlns:p14="http://schemas.microsoft.com/office/powerpoint/2010/main" val="3403514021"/>
       </p:ext>
     </p:extLst>
   </p:cSld>
@@ -3024,7 +3024,7 @@
           <p:cNvPr id="2" name="タイトル プレースホルダー 1">
             <a:extLst>
               <a:ext uri="{FF2B5EF4-FFF2-40B4-BE49-F238E27FC236}">
-                <a16:creationId xmlns:a16="http://schemas.microsoft.com/office/drawing/2014/main" id="{6A0139C8-3628-EBB9-329D-0C0A1999FDF6}"/>
+                <a16:creationId xmlns:a16="http://schemas.microsoft.com/office/drawing/2014/main" id="{57A3FC4F-538F-2F00-8417-381CADACB522}"/>
               </a:ext>
             </a:extLst>
           </p:cNvPr>
@@ -3062,7 +3062,7 @@
           <p:cNvPr id="3" name="テキスト プレースホルダー 2">
             <a:extLst>
               <a:ext uri="{FF2B5EF4-FFF2-40B4-BE49-F238E27FC236}">
-                <a16:creationId xmlns:a16="http://schemas.microsoft.com/office/drawing/2014/main" id="{9F5F7316-DA06-3250-E867-7D163793866C}"/>
+                <a16:creationId xmlns:a16="http://schemas.microsoft.com/office/drawing/2014/main" id="{B6E3444F-63A4-3DF1-D5AC-CA342B158347}"/>
               </a:ext>
             </a:extLst>
           </p:cNvPr>
@@ -3161,7 +3161,7 @@
           <p:cNvPr id="4" name="日付プレースホルダー 3">
             <a:extLst>
               <a:ext uri="{FF2B5EF4-FFF2-40B4-BE49-F238E27FC236}">
-                <a16:creationId xmlns:a16="http://schemas.microsoft.com/office/drawing/2014/main" id="{B7579DA6-7026-3614-EDA6-795071743E1B}"/>
+                <a16:creationId xmlns:a16="http://schemas.microsoft.com/office/drawing/2014/main" id="{298956D1-0362-CB4B-72A4-ABE4A3766286}"/>
               </a:ext>
             </a:extLst>
           </p:cNvPr>
@@ -3195,7 +3195,7 @@
             </a:lvl1pPr>
           </a:lstStyle>
           <a:p>
-            <a:fld id="{6B89269D-720E-49DD-8907-60321152CD14}" type="datetimeFigureOut">
+            <a:fld id="{A3DF16B0-CA0C-4E62-8286-BA216E1CFE48}" type="datetimeFigureOut">
               <a:rPr kumimoji="1" lang="ja-JP" altLang="en-US" smtClean="0"/>
               <a:t>2026/7/30</a:t>
             </a:fld>
@@ -3208,7 +3208,7 @@
           <p:cNvPr id="5" name="フッター プレースホルダー 4">
             <a:extLst>
               <a:ext uri="{FF2B5EF4-FFF2-40B4-BE49-F238E27FC236}">
-                <a16:creationId xmlns:a16="http://schemas.microsoft.com/office/drawing/2014/main" id="{CB9FC49C-CCF7-D0ED-D45E-F309EF0786F6}"/>
+                <a16:creationId xmlns:a16="http://schemas.microsoft.com/office/drawing/2014/main" id="{5575B748-6CE9-B048-6953-86E461B345DD}"/>
               </a:ext>
             </a:extLst>
           </p:cNvPr>
@@ -3251,7 +3251,7 @@
           <p:cNvPr id="6" name="スライド番号プレースホルダー 5">
             <a:extLst>
               <a:ext uri="{FF2B5EF4-FFF2-40B4-BE49-F238E27FC236}">
-                <a16:creationId xmlns:a16="http://schemas.microsoft.com/office/drawing/2014/main" id="{60FFBAD0-B287-51BA-35AB-828D8918C9EB}"/>
+                <a16:creationId xmlns:a16="http://schemas.microsoft.com/office/drawing/2014/main" id="{FCAB43CE-DB0A-BEDC-163D-585B729DFFB9}"/>
               </a:ext>
             </a:extLst>
           </p:cNvPr>
@@ -3285,7 +3285,7 @@
             </a:lvl1pPr>
           </a:lstStyle>
           <a:p>
-            <a:fld id="{C8B7375D-A02E-4A21-9363-A09D1752CEA3}" type="slidenum">
+            <a:fld id="{921CBC5F-5F50-422D-AD0D-82B6CA84F60E}" type="slidenum">
               <a:rPr kumimoji="1" lang="ja-JP" altLang="en-US" smtClean="0"/>
               <a:t>‹#›</a:t>
             </a:fld>
@@ -3296,7 +3296,7 @@
     </p:spTree>
     <p:extLst>
       <p:ext uri="{BB962C8B-B14F-4D97-AF65-F5344CB8AC3E}">
-        <p14:creationId xmlns:p14="http://schemas.microsoft.com/office/powerpoint/2010/main" val="2224295209"/>
+        <p14:creationId xmlns:p14="http://schemas.microsoft.com/office/powerpoint/2010/main" val="2671143024"/>
       </p:ext>
     </p:extLst>
   </p:cSld>
@@ -3619,7 +3619,7 @@
           <p:cNvPr id="2" name="テキスト ボックス 1">
             <a:extLst>
               <a:ext uri="{FF2B5EF4-FFF2-40B4-BE49-F238E27FC236}">
-                <a16:creationId xmlns:a16="http://schemas.microsoft.com/office/drawing/2014/main" id="{4943D3B8-DD2B-7317-6FBE-7417C02B64FC}"/>
+                <a16:creationId xmlns:a16="http://schemas.microsoft.com/office/drawing/2014/main" id="{AB119070-5BD4-CC3B-1786-B9C7C2837DCB}"/>
               </a:ext>
             </a:extLst>
           </p:cNvPr>
@@ -3665,7 +3665,7 @@
           <p:cNvPr id="3" name="テキスト ボックス 2">
             <a:extLst>
               <a:ext uri="{FF2B5EF4-FFF2-40B4-BE49-F238E27FC236}">
-                <a16:creationId xmlns:a16="http://schemas.microsoft.com/office/drawing/2014/main" id="{DC598121-D8D7-F0D2-5186-2A80DCA1D1A6}"/>
+                <a16:creationId xmlns:a16="http://schemas.microsoft.com/office/drawing/2014/main" id="{74DF9A17-4A2A-9059-A53C-4A8910372C1E}"/>
               </a:ext>
             </a:extLst>
           </p:cNvPr>
@@ -3714,7 +3714,7 @@
           <p:cNvPr id="4" name="テキスト ボックス 3">
             <a:extLst>
               <a:ext uri="{FF2B5EF4-FFF2-40B4-BE49-F238E27FC236}">
-                <a16:creationId xmlns:a16="http://schemas.microsoft.com/office/drawing/2014/main" id="{1D56DB77-B09E-71F0-2C35-5DB387521F97}"/>
+                <a16:creationId xmlns:a16="http://schemas.microsoft.com/office/drawing/2014/main" id="{07265628-8762-8293-76EE-06DF55126F5F}"/>
               </a:ext>
             </a:extLst>
           </p:cNvPr>
@@ -3754,7 +3754,7 @@
           <p:cNvPr id="5" name="テキスト ボックス 4">
             <a:extLst>
               <a:ext uri="{FF2B5EF4-FFF2-40B4-BE49-F238E27FC236}">
-                <a16:creationId xmlns:a16="http://schemas.microsoft.com/office/drawing/2014/main" id="{417AACEC-0668-52EB-B26D-5EE626A03128}"/>
+                <a16:creationId xmlns:a16="http://schemas.microsoft.com/office/drawing/2014/main" id="{AAEB8237-5E58-3051-2C68-829C0F6EC2A3}"/>
               </a:ext>
             </a:extLst>
           </p:cNvPr>
@@ -3801,7 +3801,7 @@
             <a:hlinkClick r:id="" action="ppaction://media"/>
             <a:extLst>
               <a:ext uri="{FF2B5EF4-FFF2-40B4-BE49-F238E27FC236}">
-                <a16:creationId xmlns:a16="http://schemas.microsoft.com/office/drawing/2014/main" id="{CE834D2D-68E9-7C28-34B1-E69434985FD5}"/>
+                <a16:creationId xmlns:a16="http://schemas.microsoft.com/office/drawing/2014/main" id="{678B6FD7-79DC-F1FA-B27E-BBB7CDD25B5A}"/>
               </a:ext>
             </a:extLst>
           </p:cNvPr>
@@ -3836,7 +3836,7 @@
     </p:spTree>
     <p:extLst>
       <p:ext uri="{BB962C8B-B14F-4D97-AF65-F5344CB8AC3E}">
-        <p14:creationId xmlns:p14="http://schemas.microsoft.com/office/powerpoint/2010/main" val="2953132361"/>
+        <p14:creationId xmlns:p14="http://schemas.microsoft.com/office/powerpoint/2010/main" val="692263828"/>
       </p:ext>
     </p:extLst>
   </p:cSld>
@@ -3960,7 +3960,7 @@
           <p:cNvPr id="2" name="テキスト ボックス 1">
             <a:extLst>
               <a:ext uri="{FF2B5EF4-FFF2-40B4-BE49-F238E27FC236}">
-                <a16:creationId xmlns:a16="http://schemas.microsoft.com/office/drawing/2014/main" id="{C46C6A1D-0D91-1162-5CDE-3C9A4F40714E}"/>
+                <a16:creationId xmlns:a16="http://schemas.microsoft.com/office/drawing/2014/main" id="{57E16CF7-42BD-F3F2-CB2B-9AC7F24DCAEC}"/>
               </a:ext>
             </a:extLst>
           </p:cNvPr>
@@ -4006,7 +4006,7 @@
           <p:cNvPr id="3" name="テキスト ボックス 2">
             <a:extLst>
               <a:ext uri="{FF2B5EF4-FFF2-40B4-BE49-F238E27FC236}">
-                <a16:creationId xmlns:a16="http://schemas.microsoft.com/office/drawing/2014/main" id="{374894A9-749E-5954-1DA9-92829FA14D2F}"/>
+                <a16:creationId xmlns:a16="http://schemas.microsoft.com/office/drawing/2014/main" id="{FDF753DE-44CF-1324-8827-3CF86F24F22E}"/>
               </a:ext>
             </a:extLst>
           </p:cNvPr>
@@ -4046,7 +4046,7 @@
           <p:cNvPr id="4" name="テキスト ボックス 3">
             <a:extLst>
               <a:ext uri="{FF2B5EF4-FFF2-40B4-BE49-F238E27FC236}">
-                <a16:creationId xmlns:a16="http://schemas.microsoft.com/office/drawing/2014/main" id="{DD3B357F-7B82-9DCB-B227-B1D56473CD53}"/>
+                <a16:creationId xmlns:a16="http://schemas.microsoft.com/office/drawing/2014/main" id="{6D29C2FF-83A6-BF13-99AF-FFC654AFBEF3}"/>
               </a:ext>
             </a:extLst>
           </p:cNvPr>
@@ -4110,7 +4110,7 @@
           <p:cNvPr id="5" name="テキスト ボックス 4">
             <a:extLst>
               <a:ext uri="{FF2B5EF4-FFF2-40B4-BE49-F238E27FC236}">
-                <a16:creationId xmlns:a16="http://schemas.microsoft.com/office/drawing/2014/main" id="{F934D036-1EC3-B172-1C6F-530B88FE836C}"/>
+                <a16:creationId xmlns:a16="http://schemas.microsoft.com/office/drawing/2014/main" id="{86ECF2F7-3D9D-E55A-D8D9-7847D1BC3976}"/>
               </a:ext>
             </a:extLst>
           </p:cNvPr>
@@ -4157,7 +4157,7 @@
             <a:hlinkClick r:id="" action="ppaction://media"/>
             <a:extLst>
               <a:ext uri="{FF2B5EF4-FFF2-40B4-BE49-F238E27FC236}">
-                <a16:creationId xmlns:a16="http://schemas.microsoft.com/office/drawing/2014/main" id="{C033C371-9119-5970-00AE-4617A77F6210}"/>
+                <a16:creationId xmlns:a16="http://schemas.microsoft.com/office/drawing/2014/main" id="{67C10364-E1B6-82B7-928B-51DE6352F88B}"/>
               </a:ext>
             </a:extLst>
           </p:cNvPr>
@@ -4192,7 +4192,7 @@
     </p:spTree>
     <p:extLst>
       <p:ext uri="{BB962C8B-B14F-4D97-AF65-F5344CB8AC3E}">
-        <p14:creationId xmlns:p14="http://schemas.microsoft.com/office/powerpoint/2010/main" val="325788353"/>
+        <p14:creationId xmlns:p14="http://schemas.microsoft.com/office/powerpoint/2010/main" val="654663296"/>
       </p:ext>
     </p:extLst>
   </p:cSld>
@@ -4316,7 +4316,7 @@
           <p:cNvPr id="2" name="テキスト ボックス 1">
             <a:extLst>
               <a:ext uri="{FF2B5EF4-FFF2-40B4-BE49-F238E27FC236}">
-                <a16:creationId xmlns:a16="http://schemas.microsoft.com/office/drawing/2014/main" id="{CDF3C71D-3850-FB95-ED6D-7EB285D9A9A4}"/>
+                <a16:creationId xmlns:a16="http://schemas.microsoft.com/office/drawing/2014/main" id="{EA48DDA5-84E6-3FBE-2825-8A94359B1480}"/>
               </a:ext>
             </a:extLst>
           </p:cNvPr>
@@ -4362,7 +4362,7 @@
           <p:cNvPr id="3" name="テキスト ボックス 2">
             <a:extLst>
               <a:ext uri="{FF2B5EF4-FFF2-40B4-BE49-F238E27FC236}">
-                <a16:creationId xmlns:a16="http://schemas.microsoft.com/office/drawing/2014/main" id="{E459E939-EA22-8233-94FF-E1BF0CA300FC}"/>
+                <a16:creationId xmlns:a16="http://schemas.microsoft.com/office/drawing/2014/main" id="{39304282-7546-9D86-CC37-E093E67AD83A}"/>
               </a:ext>
             </a:extLst>
           </p:cNvPr>
@@ -4402,7 +4402,7 @@
           <p:cNvPr id="4" name="テキスト ボックス 3">
             <a:extLst>
               <a:ext uri="{FF2B5EF4-FFF2-40B4-BE49-F238E27FC236}">
-                <a16:creationId xmlns:a16="http://schemas.microsoft.com/office/drawing/2014/main" id="{E8D50153-0BDB-12FF-28A4-A7CE87EFDB9E}"/>
+                <a16:creationId xmlns:a16="http://schemas.microsoft.com/office/drawing/2014/main" id="{09A64023-C4AE-A56C-9EC9-C6D61B791F3C}"/>
               </a:ext>
             </a:extLst>
           </p:cNvPr>
@@ -4497,7 +4497,7 @@
           <p:cNvPr id="5" name="テキスト ボックス 4">
             <a:extLst>
               <a:ext uri="{FF2B5EF4-FFF2-40B4-BE49-F238E27FC236}">
-                <a16:creationId xmlns:a16="http://schemas.microsoft.com/office/drawing/2014/main" id="{95264159-397F-9C03-FFBE-344910EFB93E}"/>
+                <a16:creationId xmlns:a16="http://schemas.microsoft.com/office/drawing/2014/main" id="{B0AE0E49-53E2-60D3-F5D7-D5D2A157F45A}"/>
               </a:ext>
             </a:extLst>
           </p:cNvPr>
@@ -4544,7 +4544,7 @@
             <a:hlinkClick r:id="" action="ppaction://media"/>
             <a:extLst>
               <a:ext uri="{FF2B5EF4-FFF2-40B4-BE49-F238E27FC236}">
-                <a16:creationId xmlns:a16="http://schemas.microsoft.com/office/drawing/2014/main" id="{CF717702-F5C0-5C3D-BACE-B72B87F43182}"/>
+                <a16:creationId xmlns:a16="http://schemas.microsoft.com/office/drawing/2014/main" id="{064F30AF-248B-A1C4-E17F-15350C118283}"/>
               </a:ext>
             </a:extLst>
           </p:cNvPr>
@@ -4579,7 +4579,7 @@
     </p:spTree>
     <p:extLst>
       <p:ext uri="{BB962C8B-B14F-4D97-AF65-F5344CB8AC3E}">
-        <p14:creationId xmlns:p14="http://schemas.microsoft.com/office/powerpoint/2010/main" val="2599666050"/>
+        <p14:creationId xmlns:p14="http://schemas.microsoft.com/office/powerpoint/2010/main" val="2289067895"/>
       </p:ext>
     </p:extLst>
   </p:cSld>
@@ -4703,7 +4703,7 @@
           <p:cNvPr id="2" name="テキスト ボックス 1">
             <a:extLst>
               <a:ext uri="{FF2B5EF4-FFF2-40B4-BE49-F238E27FC236}">
-                <a16:creationId xmlns:a16="http://schemas.microsoft.com/office/drawing/2014/main" id="{586D4FA6-1692-41E2-1BA3-3E10093B5C07}"/>
+                <a16:creationId xmlns:a16="http://schemas.microsoft.com/office/drawing/2014/main" id="{8AF913DC-3D17-9407-4DE3-A799496F4297}"/>
               </a:ext>
             </a:extLst>
           </p:cNvPr>
@@ -4749,7 +4749,7 @@
           <p:cNvPr id="3" name="テキスト ボックス 2">
             <a:extLst>
               <a:ext uri="{FF2B5EF4-FFF2-40B4-BE49-F238E27FC236}">
-                <a16:creationId xmlns:a16="http://schemas.microsoft.com/office/drawing/2014/main" id="{9EB0FDB6-F020-C628-FA92-EFDB44835AAD}"/>
+                <a16:creationId xmlns:a16="http://schemas.microsoft.com/office/drawing/2014/main" id="{04DAF806-64F9-0D30-4DA8-00CD61C7359A}"/>
               </a:ext>
             </a:extLst>
           </p:cNvPr>
@@ -4789,7 +4789,7 @@
           <p:cNvPr id="4" name="テキスト ボックス 3">
             <a:extLst>
               <a:ext uri="{FF2B5EF4-FFF2-40B4-BE49-F238E27FC236}">
-                <a16:creationId xmlns:a16="http://schemas.microsoft.com/office/drawing/2014/main" id="{094765E7-AE61-67B8-E575-4D13AD4A03D5}"/>
+                <a16:creationId xmlns:a16="http://schemas.microsoft.com/office/drawing/2014/main" id="{C8FEB309-9123-3EE0-C786-B712218D33DA}"/>
               </a:ext>
             </a:extLst>
           </p:cNvPr>
@@ -4899,7 +4899,7 @@
           <p:cNvPr id="5" name="テキスト ボックス 4">
             <a:extLst>
               <a:ext uri="{FF2B5EF4-FFF2-40B4-BE49-F238E27FC236}">
-                <a16:creationId xmlns:a16="http://schemas.microsoft.com/office/drawing/2014/main" id="{554C870D-0603-5476-F90D-90B8F4173FDB}"/>
+                <a16:creationId xmlns:a16="http://schemas.microsoft.com/office/drawing/2014/main" id="{2EF506CA-32F2-47A4-5392-E09C27345D9C}"/>
               </a:ext>
             </a:extLst>
           </p:cNvPr>
@@ -4946,7 +4946,7 @@
             <a:hlinkClick r:id="" action="ppaction://media"/>
             <a:extLst>
               <a:ext uri="{FF2B5EF4-FFF2-40B4-BE49-F238E27FC236}">
-                <a16:creationId xmlns:a16="http://schemas.microsoft.com/office/drawing/2014/main" id="{D70F6BDF-6D0A-C86F-730C-2116764F0C60}"/>
+                <a16:creationId xmlns:a16="http://schemas.microsoft.com/office/drawing/2014/main" id="{DC315349-59DF-8C9B-590D-05617CFA872E}"/>
               </a:ext>
             </a:extLst>
           </p:cNvPr>
@@ -4981,7 +4981,7 @@
     </p:spTree>
     <p:extLst>
       <p:ext uri="{BB962C8B-B14F-4D97-AF65-F5344CB8AC3E}">
-        <p14:creationId xmlns:p14="http://schemas.microsoft.com/office/powerpoint/2010/main" val="3628195885"/>
+        <p14:creationId xmlns:p14="http://schemas.microsoft.com/office/powerpoint/2010/main" val="3499978641"/>
       </p:ext>
     </p:extLst>
   </p:cSld>
@@ -5105,7 +5105,7 @@
           <p:cNvPr id="2" name="テキスト ボックス 1">
             <a:extLst>
               <a:ext uri="{FF2B5EF4-FFF2-40B4-BE49-F238E27FC236}">
-                <a16:creationId xmlns:a16="http://schemas.microsoft.com/office/drawing/2014/main" id="{B976A48D-D749-B078-7DAE-7383BCD2C26A}"/>
+                <a16:creationId xmlns:a16="http://schemas.microsoft.com/office/drawing/2014/main" id="{04DCE1A5-3716-F25C-56E7-F81949623D14}"/>
               </a:ext>
             </a:extLst>
           </p:cNvPr>
@@ -5151,7 +5151,7 @@
           <p:cNvPr id="3" name="テキスト ボックス 2">
             <a:extLst>
               <a:ext uri="{FF2B5EF4-FFF2-40B4-BE49-F238E27FC236}">
-                <a16:creationId xmlns:a16="http://schemas.microsoft.com/office/drawing/2014/main" id="{D0FCAABF-E4DB-A541-D289-31155637545D}"/>
+                <a16:creationId xmlns:a16="http://schemas.microsoft.com/office/drawing/2014/main" id="{99B4251D-1794-03F1-996A-7B35700058A6}"/>
               </a:ext>
             </a:extLst>
           </p:cNvPr>
@@ -5191,7 +5191,7 @@
           <p:cNvPr id="4" name="テキスト ボックス 3">
             <a:extLst>
               <a:ext uri="{FF2B5EF4-FFF2-40B4-BE49-F238E27FC236}">
-                <a16:creationId xmlns:a16="http://schemas.microsoft.com/office/drawing/2014/main" id="{2E46412A-F1C8-B50A-AD71-D59E28B61191}"/>
+                <a16:creationId xmlns:a16="http://schemas.microsoft.com/office/drawing/2014/main" id="{6ED6C90B-3145-C9FC-C5AA-11B96E8B08E9}"/>
               </a:ext>
             </a:extLst>
           </p:cNvPr>
@@ -5215,20 +5215,14 @@
           <a:lstStyle/>
           <a:p>
             <a:r>
-              <a:rPr kumimoji="1" lang="en-US" altLang="ja-JP" sz="2000">
+              <a:rPr kumimoji="1" lang="ja-JP" altLang="en-US" sz="2000">
                 <a:solidFill>
                   <a:srgbClr val="333333"/>
                 </a:solidFill>
                 <a:latin typeface="Arial" panose="020B0604020202020204" pitchFamily="34" charset="0"/>
               </a:rPr>
-              <a:t>Set confirmed custom domain</a:t>
-            </a:r>
-            <a:endParaRPr kumimoji="1" lang="ja-JP" altLang="en-US" sz="2000">
-              <a:solidFill>
-                <a:srgbClr val="333333"/>
-              </a:solidFill>
-              <a:latin typeface="Arial" panose="020B0604020202020204" pitchFamily="34" charset="0"/>
-            </a:endParaRPr>
+              <a:t>直近のコミットでは、実装の見直しと継続的な改善が行われました。</a:t>
+            </a:r>
           </a:p>
         </p:txBody>
       </p:sp>
@@ -5237,7 +5231,7 @@
           <p:cNvPr id="5" name="テキスト ボックス 4">
             <a:extLst>
               <a:ext uri="{FF2B5EF4-FFF2-40B4-BE49-F238E27FC236}">
-                <a16:creationId xmlns:a16="http://schemas.microsoft.com/office/drawing/2014/main" id="{B5F9693D-B179-8CFF-A325-7D47534E12D9}"/>
+                <a16:creationId xmlns:a16="http://schemas.microsoft.com/office/drawing/2014/main" id="{4FFEE387-B01C-D4C8-E1A5-BC581E6B5679}"/>
               </a:ext>
             </a:extLst>
           </p:cNvPr>
@@ -5284,7 +5278,7 @@
             <a:hlinkClick r:id="" action="ppaction://media"/>
             <a:extLst>
               <a:ext uri="{FF2B5EF4-FFF2-40B4-BE49-F238E27FC236}">
-                <a16:creationId xmlns:a16="http://schemas.microsoft.com/office/drawing/2014/main" id="{426E514E-FFA8-5887-BFD8-72A9DDC03A54}"/>
+                <a16:creationId xmlns:a16="http://schemas.microsoft.com/office/drawing/2014/main" id="{1E9ADA7C-CF33-6C6C-79FB-1DED1E9EAFF5}"/>
               </a:ext>
             </a:extLst>
           </p:cNvPr>
@@ -5319,7 +5313,7 @@
     </p:spTree>
     <p:extLst>
       <p:ext uri="{BB962C8B-B14F-4D97-AF65-F5344CB8AC3E}">
-        <p14:creationId xmlns:p14="http://schemas.microsoft.com/office/powerpoint/2010/main" val="1120065054"/>
+        <p14:creationId xmlns:p14="http://schemas.microsoft.com/office/powerpoint/2010/main" val="2953143169"/>
       </p:ext>
     </p:extLst>
   </p:cSld>
@@ -5362,7 +5356,7 @@
                                   <p:childTnLst>
                                     <p:cmd type="call" cmd="playFrom(0.0)">
                                       <p:cBhvr>
-                                        <p:cTn id="6" dur="6451" fill="hold"/>
+                                        <p:cTn id="6" dur="6076" fill="hold"/>
                                         <p:tgtEl>
                                           <p:spTgt spid="6"/>
                                         </p:tgtEl>
@@ -5443,7 +5437,7 @@
           <p:cNvPr id="2" name="テキスト ボックス 1">
             <a:extLst>
               <a:ext uri="{FF2B5EF4-FFF2-40B4-BE49-F238E27FC236}">
-                <a16:creationId xmlns:a16="http://schemas.microsoft.com/office/drawing/2014/main" id="{F3A6A9A2-F136-4F88-DFCE-6203468BAC19}"/>
+                <a16:creationId xmlns:a16="http://schemas.microsoft.com/office/drawing/2014/main" id="{7CC13E10-E50A-782E-579F-77E194697E60}"/>
               </a:ext>
             </a:extLst>
           </p:cNvPr>
@@ -5489,7 +5483,7 @@
           <p:cNvPr id="3" name="テキスト ボックス 2">
             <a:extLst>
               <a:ext uri="{FF2B5EF4-FFF2-40B4-BE49-F238E27FC236}">
-                <a16:creationId xmlns:a16="http://schemas.microsoft.com/office/drawing/2014/main" id="{AAF2BE49-D262-DFE0-05D4-BA89465A79A5}"/>
+                <a16:creationId xmlns:a16="http://schemas.microsoft.com/office/drawing/2014/main" id="{45DAB7E3-2008-FB18-F4BE-0B7A2E0B8CDC}"/>
               </a:ext>
             </a:extLst>
           </p:cNvPr>
@@ -5529,7 +5523,7 @@
           <p:cNvPr id="4" name="テキスト ボックス 3">
             <a:extLst>
               <a:ext uri="{FF2B5EF4-FFF2-40B4-BE49-F238E27FC236}">
-                <a16:creationId xmlns:a16="http://schemas.microsoft.com/office/drawing/2014/main" id="{E1AB51C9-2ACE-A14F-D931-A99F606E5F8F}"/>
+                <a16:creationId xmlns:a16="http://schemas.microsoft.com/office/drawing/2014/main" id="{C00F79D9-86C5-0EC9-3016-073EFC6781D8}"/>
               </a:ext>
             </a:extLst>
           </p:cNvPr>
@@ -5594,7 +5588,7 @@
           <p:cNvPr id="5" name="テキスト ボックス 4">
             <a:extLst>
               <a:ext uri="{FF2B5EF4-FFF2-40B4-BE49-F238E27FC236}">
-                <a16:creationId xmlns:a16="http://schemas.microsoft.com/office/drawing/2014/main" id="{48760A4B-13F3-8674-62EA-B3C996552F1A}"/>
+                <a16:creationId xmlns:a16="http://schemas.microsoft.com/office/drawing/2014/main" id="{8F4E072A-E16C-AFA8-ACF2-4F1DCBA68942}"/>
               </a:ext>
             </a:extLst>
           </p:cNvPr>
@@ -5641,7 +5635,7 @@
             <a:hlinkClick r:id="" action="ppaction://media"/>
             <a:extLst>
               <a:ext uri="{FF2B5EF4-FFF2-40B4-BE49-F238E27FC236}">
-                <a16:creationId xmlns:a16="http://schemas.microsoft.com/office/drawing/2014/main" id="{29E8EA23-F9BB-3A6C-32EC-F0B682587D90}"/>
+                <a16:creationId xmlns:a16="http://schemas.microsoft.com/office/drawing/2014/main" id="{68B8164B-391B-D98E-B8FF-DEFA2DD995B5}"/>
               </a:ext>
             </a:extLst>
           </p:cNvPr>
@@ -5676,7 +5670,7 @@
     </p:spTree>
     <p:extLst>
       <p:ext uri="{BB962C8B-B14F-4D97-AF65-F5344CB8AC3E}">
-        <p14:creationId xmlns:p14="http://schemas.microsoft.com/office/powerpoint/2010/main" val="1074677437"/>
+        <p14:creationId xmlns:p14="http://schemas.microsoft.com/office/powerpoint/2010/main" val="1833613139"/>
       </p:ext>
     </p:extLst>
   </p:cSld>
